--- a/classes/parte-4-seguridad-de-aplicaciones-web/109-vulnerabilidades-de-logica-de-negocio/clase-109-presentacion.pptx
+++ b/classes/parte-4-seguridad-de-aplicaciones-web/109-vulnerabilidades-de-logica-de-negocio/clase-109-presentacion.pptx
@@ -17,6 +17,9 @@
     <p:sldId id="265" r:id="rId16"/>
     <p:sldId id="266" r:id="rId17"/>
     <p:sldId id="267" r:id="rId18"/>
+    <p:sldId id="268" r:id="rId19"/>
+    <p:sldId id="269" r:id="rId20"/>
+    <p:sldId id="270" r:id="rId21"/>
   </p:sldIdLst>
   <p:sldSz cx="9144000" cy="6858000" type="screen4x3"/>
   <p:notesSz cx="6858000" cy="9144000"/>
@@ -3198,7 +3201,7 @@
                   <a:srgbClr val="0B3D2E"/>
                 </a:solidFill>
               </a:rPr>
-              <a:t>⚠️ Errores comunes</a:t>
+              <a:t>✍️ Ejercicios</a:t>
             </a:r>
           </a:p>
         </p:txBody>
@@ -3236,67 +3239,82 @@
                   <a:srgbClr val="22282E"/>
                 </a:solidFill>
               </a:rPr>
-              <a:t>•  El precio se recalcula — Servidor valida; busca otro parámetro de negocio</a:t>
-            </a:r>
-          </a:p>
-          <a:p>
-            <a:pPr>
-              <a:spcAft>
-                <a:spcPts val="600"/>
-              </a:spcAft>
-            </a:pPr>
-            <a:r>
-              <a:rPr sz="1500">
-                <a:solidFill>
-                  <a:srgbClr val="22282E"/>
-                </a:solidFill>
-              </a:rPr>
-              <a:t>•  Flow no se puede saltar — Estados bien controlados; documenta la fortaleza</a:t>
-            </a:r>
-          </a:p>
-          <a:p>
-            <a:pPr>
-              <a:spcAft>
-                <a:spcPts val="600"/>
-              </a:spcAft>
-            </a:pPr>
-            <a:r>
-              <a:rPr sz="1500">
-                <a:solidFill>
-                  <a:srgbClr val="22282E"/>
-                </a:solidFill>
-              </a:rPr>
-              <a:t>•  Race condition no reproduce — Envía peticiones más simultáneas (single-packet)</a:t>
-            </a:r>
-          </a:p>
-          <a:p>
-            <a:pPr>
-              <a:spcAft>
-                <a:spcPts val="600"/>
-              </a:spcAft>
-            </a:pPr>
-            <a:r>
-              <a:rPr sz="1500">
-                <a:solidFill>
-                  <a:srgbClr val="22282E"/>
-                </a:solidFill>
-              </a:rPr>
-              <a:t>•  Cupón no reutilizable — Idempotencia correcta; prueba combinaciones</a:t>
-            </a:r>
-          </a:p>
-          <a:p>
-            <a:pPr>
-              <a:spcAft>
-                <a:spcPts val="600"/>
-              </a:spcAft>
-            </a:pPr>
-            <a:r>
-              <a:rPr sz="1500">
-                <a:solidFill>
-                  <a:srgbClr val="22282E"/>
-                </a:solidFill>
-              </a:rPr>
-              <a:t>•  Escáner no encontró nada — Normal: la lógica requiere análisis manual</a:t>
+              <a:t>•  Encuentra 3 suposiciones del desarrollador que se puedan romper en Juice Shop.</a:t>
+            </a:r>
+          </a:p>
+          <a:p>
+            <a:pPr>
+              <a:spcAft>
+                <a:spcPts val="600"/>
+              </a:spcAft>
+            </a:pPr>
+            <a:r>
+              <a:rPr sz="1500">
+                <a:solidFill>
+                  <a:srgbClr val="22282E"/>
+                </a:solidFill>
+              </a:rPr>
+              <a:t>•  Manipula un precio a un valor negativo y explica el impacto.</a:t>
+            </a:r>
+          </a:p>
+          <a:p>
+            <a:pPr>
+              <a:spcAft>
+                <a:spcPts val="600"/>
+              </a:spcAft>
+            </a:pPr>
+            <a:r>
+              <a:rPr sz="1500">
+                <a:solidFill>
+                  <a:srgbClr val="22282E"/>
+                </a:solidFill>
+              </a:rPr>
+              <a:t>•  Diseña un flow bypass saltando un paso de validación.</a:t>
+            </a:r>
+          </a:p>
+          <a:p>
+            <a:pPr>
+              <a:spcAft>
+                <a:spcPts val="600"/>
+              </a:spcAft>
+            </a:pPr>
+            <a:r>
+              <a:rPr sz="1500">
+                <a:solidFill>
+                  <a:srgbClr val="22282E"/>
+                </a:solidFill>
+              </a:rPr>
+              <a:t>•  Reproduce una race condition de canje múltiple con peticiones paralelas.</a:t>
+            </a:r>
+          </a:p>
+          <a:p>
+            <a:pPr>
+              <a:spcAft>
+                <a:spcPts val="600"/>
+              </a:spcAft>
+            </a:pPr>
+            <a:r>
+              <a:rPr sz="1500">
+                <a:solidFill>
+                  <a:srgbClr val="22282E"/>
+                </a:solidFill>
+              </a:rPr>
+              <a:t>•  Explica por qué recalcular en servidor evita la manipulación de precios.</a:t>
+            </a:r>
+          </a:p>
+          <a:p>
+            <a:pPr>
+              <a:spcAft>
+                <a:spcPts val="600"/>
+              </a:spcAft>
+            </a:pPr>
+            <a:r>
+              <a:rPr sz="1500">
+                <a:solidFill>
+                  <a:srgbClr val="22282E"/>
+                </a:solidFill>
+              </a:rPr>
+              <a:t>•  Propón validaciones de negocio para un carrito de compra.</a:t>
             </a:r>
           </a:p>
         </p:txBody>
@@ -3347,7 +3365,7 @@
                   <a:srgbClr val="0B3D2E"/>
                 </a:solidFill>
               </a:rPr>
-              <a:t>❓ Preguntas frecuentes</a:t>
+              <a:t>📝 Reto verificable</a:t>
             </a:r>
           </a:p>
         </p:txBody>
@@ -3385,82 +3403,22 @@
                   <a:srgbClr val="22282E"/>
                 </a:solidFill>
               </a:rPr>
-              <a:t>•  ❓ ¿Por qué los escáneres no las detectan?</a:t>
-            </a:r>
-          </a:p>
-          <a:p>
-            <a:pPr>
-              <a:spcAft>
-                <a:spcPts val="600"/>
-              </a:spcAft>
-            </a:pPr>
-            <a:r>
-              <a:rPr sz="1500">
-                <a:solidFill>
-                  <a:srgbClr val="22282E"/>
-                </a:solidFill>
-              </a:rPr>
-              <a:t>•  Porque dependen del significado de negocio, que la herramienta no entiende. Requieren razonamiento humano.</a:t>
-            </a:r>
-          </a:p>
-          <a:p>
-            <a:pPr>
-              <a:spcAft>
-                <a:spcPts val="600"/>
-              </a:spcAft>
-            </a:pPr>
-            <a:r>
-              <a:rPr sz="1500">
-                <a:solidFill>
-                  <a:srgbClr val="22282E"/>
-                </a:solidFill>
-              </a:rPr>
-              <a:t>•  ❓ ¿Qué es una race condition en la práctica?</a:t>
-            </a:r>
-          </a:p>
-          <a:p>
-            <a:pPr>
-              <a:spcAft>
-                <a:spcPts val="600"/>
-              </a:spcAft>
-            </a:pPr>
-            <a:r>
-              <a:rPr sz="1500">
-                <a:solidFill>
-                  <a:srgbClr val="22282E"/>
-                </a:solidFill>
-              </a:rPr>
-              <a:t>•  Aprovechar la ventana entre "comprobar" y "usar" enviando peticiones simultáneas para, por ejemplo, canjear dos veces un mismo saldo.</a:t>
-            </a:r>
-          </a:p>
-          <a:p>
-            <a:pPr>
-              <a:spcAft>
-                <a:spcPts val="600"/>
-              </a:spcAft>
-            </a:pPr>
-            <a:r>
-              <a:rPr sz="1500">
-                <a:solidFill>
-                  <a:srgbClr val="22282E"/>
-                </a:solidFill>
-              </a:rPr>
-              <a:t>•  ❓ ¿Cómo se defienden?</a:t>
-            </a:r>
-          </a:p>
-          <a:p>
-            <a:pPr>
-              <a:spcAft>
-                <a:spcPts val="600"/>
-              </a:spcAft>
-            </a:pPr>
-            <a:r>
-              <a:rPr sz="1500">
-                <a:solidFill>
-                  <a:srgbClr val="22282E"/>
-                </a:solidFill>
-              </a:rPr>
-              <a:t>•  Validando y recalculando toda regla en el servidor, usando bloqueos/transacciones e idempotencia en operaciones sensibles.</a:t>
+              <a:t>•  Resuelve un lab de lógica de negocio de PortSwigger (manipulación de precio, flow bypass o race condition) y demuestra el beneficio indebido.</a:t>
+            </a:r>
+          </a:p>
+          <a:p>
+            <a:pPr>
+              <a:spcAft>
+                <a:spcPts val="600"/>
+              </a:spcAft>
+            </a:pPr>
+            <a:r>
+              <a:rPr sz="1500">
+                <a:solidFill>
+                  <a:srgbClr val="22282E"/>
+                </a:solidFill>
+              </a:rPr>
+              <a:t>•  Criterio de aceptación: el lab queda resuelto, documentas la regla de negocio vulnerada, la petición manipulada/paralela y la defensa (validación y recálculo en servidor, idempotencia, bloqueos).</a:t>
             </a:r>
           </a:p>
         </p:txBody>
@@ -3511,7 +3469,7 @@
                   <a:srgbClr val="0B3D2E"/>
                 </a:solidFill>
               </a:rPr>
-              <a:t>🔗 Referencias</a:t>
+              <a:t>⚠️ Errores comunes</a:t>
             </a:r>
           </a:p>
         </p:txBody>
@@ -3549,6 +3507,319 @@
                   <a:srgbClr val="22282E"/>
                 </a:solidFill>
               </a:rPr>
+              <a:t>•  El precio se recalcula — Servidor valida; busca otro parámetro de negocio</a:t>
+            </a:r>
+          </a:p>
+          <a:p>
+            <a:pPr>
+              <a:spcAft>
+                <a:spcPts val="600"/>
+              </a:spcAft>
+            </a:pPr>
+            <a:r>
+              <a:rPr sz="1500">
+                <a:solidFill>
+                  <a:srgbClr val="22282E"/>
+                </a:solidFill>
+              </a:rPr>
+              <a:t>•  Flow no se puede saltar — Estados bien controlados; documenta la fortaleza</a:t>
+            </a:r>
+          </a:p>
+          <a:p>
+            <a:pPr>
+              <a:spcAft>
+                <a:spcPts val="600"/>
+              </a:spcAft>
+            </a:pPr>
+            <a:r>
+              <a:rPr sz="1500">
+                <a:solidFill>
+                  <a:srgbClr val="22282E"/>
+                </a:solidFill>
+              </a:rPr>
+              <a:t>•  Race condition no reproduce — Envía peticiones más simultáneas (single-packet)</a:t>
+            </a:r>
+          </a:p>
+          <a:p>
+            <a:pPr>
+              <a:spcAft>
+                <a:spcPts val="600"/>
+              </a:spcAft>
+            </a:pPr>
+            <a:r>
+              <a:rPr sz="1500">
+                <a:solidFill>
+                  <a:srgbClr val="22282E"/>
+                </a:solidFill>
+              </a:rPr>
+              <a:t>•  Cupón no reutilizable — Idempotencia correcta; prueba combinaciones</a:t>
+            </a:r>
+          </a:p>
+          <a:p>
+            <a:pPr>
+              <a:spcAft>
+                <a:spcPts val="600"/>
+              </a:spcAft>
+            </a:pPr>
+            <a:r>
+              <a:rPr sz="1500">
+                <a:solidFill>
+                  <a:srgbClr val="22282E"/>
+                </a:solidFill>
+              </a:rPr>
+              <a:t>•  Escáner no encontró nada — Normal: la lógica requiere análisis manual</a:t>
+            </a:r>
+          </a:p>
+        </p:txBody>
+      </p:sp>
+    </p:spTree>
+  </p:cSld>
+  <p:clrMapOvr>
+    <a:masterClrMapping/>
+  </p:clrMapOvr>
+</p:sld>
+</file>
+
+<file path=ppt/slides/slide13.xml><?xml version="1.0" encoding="utf-8"?>
+<p:sld xmlns:a="http://schemas.openxmlformats.org/drawingml/2006/main" xmlns:p="http://schemas.openxmlformats.org/presentationml/2006/main" xmlns:r="http://schemas.openxmlformats.org/officeDocument/2006/relationships">
+  <p:cSld>
+    <p:spTree>
+      <p:nvGrpSpPr>
+        <p:cNvPr id="1" name=""/>
+        <p:cNvGrpSpPr/>
+        <p:nvPr/>
+      </p:nvGrpSpPr>
+      <p:grpSpPr/>
+      <p:sp>
+        <p:nvSpPr>
+          <p:cNvPr id="2" name="TextBox 1"/>
+          <p:cNvSpPr txBox="1"/>
+          <p:nvPr/>
+        </p:nvSpPr>
+        <p:spPr>
+          <a:xfrm>
+            <a:off x="457200" y="320040"/>
+            <a:ext cx="8229600" cy="822960"/>
+          </a:xfrm>
+          <a:prstGeom prst="rect">
+            <a:avLst/>
+          </a:prstGeom>
+          <a:noFill/>
+        </p:spPr>
+        <p:txBody>
+          <a:bodyPr wrap="square">
+            <a:spAutoFit/>
+          </a:bodyPr>
+          <a:lstStyle/>
+          <a:p>
+            <a:r>
+              <a:rPr sz="2600" b="1">
+                <a:solidFill>
+                  <a:srgbClr val="0B3D2E"/>
+                </a:solidFill>
+              </a:rPr>
+              <a:t>❓ Preguntas frecuentes</a:t>
+            </a:r>
+          </a:p>
+        </p:txBody>
+      </p:sp>
+      <p:sp>
+        <p:nvSpPr>
+          <p:cNvPr id="3" name="TextBox 2"/>
+          <p:cNvSpPr txBox="1"/>
+          <p:nvPr/>
+        </p:nvSpPr>
+        <p:spPr>
+          <a:xfrm>
+            <a:off x="457200" y="1280160"/>
+            <a:ext cx="8229600" cy="4937760"/>
+          </a:xfrm>
+          <a:prstGeom prst="rect">
+            <a:avLst/>
+          </a:prstGeom>
+          <a:noFill/>
+        </p:spPr>
+        <p:txBody>
+          <a:bodyPr wrap="square">
+            <a:spAutoFit/>
+          </a:bodyPr>
+          <a:lstStyle/>
+          <a:p>
+            <a:pPr>
+              <a:spcAft>
+                <a:spcPts val="600"/>
+              </a:spcAft>
+            </a:pPr>
+            <a:r>
+              <a:rPr sz="1500">
+                <a:solidFill>
+                  <a:srgbClr val="22282E"/>
+                </a:solidFill>
+              </a:rPr>
+              <a:t>•  ❓ ¿Por qué los escáneres no las detectan?</a:t>
+            </a:r>
+          </a:p>
+          <a:p>
+            <a:pPr>
+              <a:spcAft>
+                <a:spcPts val="600"/>
+              </a:spcAft>
+            </a:pPr>
+            <a:r>
+              <a:rPr sz="1500">
+                <a:solidFill>
+                  <a:srgbClr val="22282E"/>
+                </a:solidFill>
+              </a:rPr>
+              <a:t>•  Porque dependen del significado de negocio, que la herramienta no entiende. Requieren razonamiento humano.</a:t>
+            </a:r>
+          </a:p>
+          <a:p>
+            <a:pPr>
+              <a:spcAft>
+                <a:spcPts val="600"/>
+              </a:spcAft>
+            </a:pPr>
+            <a:r>
+              <a:rPr sz="1500">
+                <a:solidFill>
+                  <a:srgbClr val="22282E"/>
+                </a:solidFill>
+              </a:rPr>
+              <a:t>•  ❓ ¿Qué es una race condition en la práctica?</a:t>
+            </a:r>
+          </a:p>
+          <a:p>
+            <a:pPr>
+              <a:spcAft>
+                <a:spcPts val="600"/>
+              </a:spcAft>
+            </a:pPr>
+            <a:r>
+              <a:rPr sz="1500">
+                <a:solidFill>
+                  <a:srgbClr val="22282E"/>
+                </a:solidFill>
+              </a:rPr>
+              <a:t>•  Aprovechar la ventana entre "comprobar" y "usar" enviando peticiones simultáneas para, por ejemplo, canjear dos veces un mismo saldo.</a:t>
+            </a:r>
+          </a:p>
+          <a:p>
+            <a:pPr>
+              <a:spcAft>
+                <a:spcPts val="600"/>
+              </a:spcAft>
+            </a:pPr>
+            <a:r>
+              <a:rPr sz="1500">
+                <a:solidFill>
+                  <a:srgbClr val="22282E"/>
+                </a:solidFill>
+              </a:rPr>
+              <a:t>•  ❓ ¿Cómo se defienden?</a:t>
+            </a:r>
+          </a:p>
+          <a:p>
+            <a:pPr>
+              <a:spcAft>
+                <a:spcPts val="600"/>
+              </a:spcAft>
+            </a:pPr>
+            <a:r>
+              <a:rPr sz="1500">
+                <a:solidFill>
+                  <a:srgbClr val="22282E"/>
+                </a:solidFill>
+              </a:rPr>
+              <a:t>•  Validando y recalculando toda regla en el servidor, usando bloqueos/transacciones e idempotencia en operaciones sensibles.</a:t>
+            </a:r>
+          </a:p>
+        </p:txBody>
+      </p:sp>
+    </p:spTree>
+  </p:cSld>
+  <p:clrMapOvr>
+    <a:masterClrMapping/>
+  </p:clrMapOvr>
+</p:sld>
+</file>
+
+<file path=ppt/slides/slide14.xml><?xml version="1.0" encoding="utf-8"?>
+<p:sld xmlns:a="http://schemas.openxmlformats.org/drawingml/2006/main" xmlns:p="http://schemas.openxmlformats.org/presentationml/2006/main" xmlns:r="http://schemas.openxmlformats.org/officeDocument/2006/relationships">
+  <p:cSld>
+    <p:spTree>
+      <p:nvGrpSpPr>
+        <p:cNvPr id="1" name=""/>
+        <p:cNvGrpSpPr/>
+        <p:nvPr/>
+      </p:nvGrpSpPr>
+      <p:grpSpPr/>
+      <p:sp>
+        <p:nvSpPr>
+          <p:cNvPr id="2" name="TextBox 1"/>
+          <p:cNvSpPr txBox="1"/>
+          <p:nvPr/>
+        </p:nvSpPr>
+        <p:spPr>
+          <a:xfrm>
+            <a:off x="457200" y="320040"/>
+            <a:ext cx="8229600" cy="822960"/>
+          </a:xfrm>
+          <a:prstGeom prst="rect">
+            <a:avLst/>
+          </a:prstGeom>
+          <a:noFill/>
+        </p:spPr>
+        <p:txBody>
+          <a:bodyPr wrap="square">
+            <a:spAutoFit/>
+          </a:bodyPr>
+          <a:lstStyle/>
+          <a:p>
+            <a:r>
+              <a:rPr sz="2600" b="1">
+                <a:solidFill>
+                  <a:srgbClr val="0B3D2E"/>
+                </a:solidFill>
+              </a:rPr>
+              <a:t>🔗 Referencias</a:t>
+            </a:r>
+          </a:p>
+        </p:txBody>
+      </p:sp>
+      <p:sp>
+        <p:nvSpPr>
+          <p:cNvPr id="3" name="TextBox 2"/>
+          <p:cNvSpPr txBox="1"/>
+          <p:nvPr/>
+        </p:nvSpPr>
+        <p:spPr>
+          <a:xfrm>
+            <a:off x="457200" y="1280160"/>
+            <a:ext cx="8229600" cy="4937760"/>
+          </a:xfrm>
+          <a:prstGeom prst="rect">
+            <a:avLst/>
+          </a:prstGeom>
+          <a:noFill/>
+        </p:spPr>
+        <p:txBody>
+          <a:bodyPr wrap="square">
+            <a:spAutoFit/>
+          </a:bodyPr>
+          <a:lstStyle/>
+          <a:p>
+            <a:pPr>
+              <a:spcAft>
+                <a:spcPts val="600"/>
+              </a:spcAft>
+            </a:pPr>
+            <a:r>
+              <a:rPr sz="1500">
+                <a:solidFill>
+                  <a:srgbClr val="22282E"/>
+                </a:solidFill>
+              </a:rPr>
               <a:t>•  Yaworski, Real-World Bug Hunting.</a:t>
             </a:r>
           </a:p>
@@ -3599,6 +3870,81 @@
           </a:p>
         </p:txBody>
       </p:sp>
+    </p:spTree>
+  </p:cSld>
+  <p:clrMapOvr>
+    <a:masterClrMapping/>
+  </p:clrMapOvr>
+</p:sld>
+</file>
+
+<file path=ppt/slides/slide15.xml><?xml version="1.0" encoding="utf-8"?>
+<p:sld xmlns:a="http://schemas.openxmlformats.org/drawingml/2006/main" xmlns:p="http://schemas.openxmlformats.org/presentationml/2006/main" xmlns:r="http://schemas.openxmlformats.org/officeDocument/2006/relationships">
+  <p:cSld>
+    <p:spTree>
+      <p:nvGrpSpPr>
+        <p:cNvPr id="1" name=""/>
+        <p:cNvGrpSpPr/>
+        <p:nvPr/>
+      </p:nvGrpSpPr>
+      <p:grpSpPr/>
+      <p:sp>
+        <p:nvSpPr>
+          <p:cNvPr id="2" name="TextBox 1"/>
+          <p:cNvSpPr txBox="1"/>
+          <p:nvPr/>
+        </p:nvSpPr>
+        <p:spPr>
+          <a:xfrm>
+            <a:off x="457200" y="274320"/>
+            <a:ext cx="8229600" cy="640080"/>
+          </a:xfrm>
+          <a:prstGeom prst="rect">
+            <a:avLst/>
+          </a:prstGeom>
+          <a:noFill/>
+        </p:spPr>
+        <p:txBody>
+          <a:bodyPr wrap="square">
+            <a:spAutoFit/>
+          </a:bodyPr>
+          <a:lstStyle/>
+          <a:p>
+            <a:r>
+              <a:rPr sz="2200" b="1">
+                <a:solidFill>
+                  <a:srgbClr val="0B3D2E"/>
+                </a:solidFill>
+              </a:rPr>
+              <a:t>Diagrama de la clase</a:t>
+            </a:r>
+          </a:p>
+        </p:txBody>
+      </p:sp>
+      <p:pic>
+        <p:nvPicPr>
+          <p:cNvPr id="3" name="Picture 2" descr="26be7fb10d6e21e6.png"/>
+          <p:cNvPicPr>
+            <a:picLocks noChangeAspect="1"/>
+          </p:cNvPicPr>
+          <p:nvPr/>
+        </p:nvPicPr>
+        <p:blipFill>
+          <a:blip r:embed="rId2"/>
+          <a:stretch>
+            <a:fillRect/>
+          </a:stretch>
+        </p:blipFill>
+        <p:spPr>
+          <a:xfrm>
+            <a:off x="457200" y="1632204"/>
+            <a:ext cx="8229600" cy="4233672"/>
+          </a:xfrm>
+          <a:prstGeom prst="rect">
+            <a:avLst/>
+          </a:prstGeom>
+        </p:spPr>
+      </p:pic>
     </p:spTree>
   </p:cSld>
   <p:clrMapOvr>
@@ -3683,7 +4029,7 @@
                   <a:srgbClr val="22282E"/>
                 </a:solidFill>
               </a:rPr>
-              <a:t>•  Descubrir fallos de lógica de negocio: vulnerabilidades que no rompen la tecnología sino las reglas de la aplicación (precios negativos, saltarse pasos, abusar de descuentos, condiciones de carrera). No las detectan los escáneres automáticos; requieren entender el flujo y pensar como un adversario creativo.</a:t>
+              <a:t>•  Descubrir fallos de lógica de negocio: vulnerabilidades que no rompen la tecnología sino las reglas de la aplicación (precios negativos, saltarse pasos, abusar de descuentos, condiciones de carrera).…</a:t>
             </a:r>
           </a:p>
         </p:txBody>
@@ -4077,7 +4423,7 @@
                   <a:srgbClr val="0B3D2E"/>
                 </a:solidFill>
               </a:rPr>
-              <a:t>📖 Definiciones y características</a:t>
+              <a:t>🧠 Explicación en profundidad</a:t>
             </a:r>
           </a:p>
         </p:txBody>
@@ -4115,82 +4461,97 @@
                   <a:srgbClr val="22282E"/>
                 </a:solidFill>
               </a:rPr>
-              <a:t>•  Falla de lógica: violación de una regla de negocio, no de una tecnología. Característica: invisible para los escáneres.</a:t>
-            </a:r>
-          </a:p>
-          <a:p>
-            <a:pPr>
-              <a:spcAft>
-                <a:spcPts val="600"/>
-              </a:spcAft>
-            </a:pPr>
-            <a:r>
-              <a:rPr sz="1500">
-                <a:solidFill>
-                  <a:srgbClr val="22282E"/>
-                </a:solidFill>
-              </a:rPr>
-              <a:t>•  Flow bypass: completar una operación saltándose pasos o validaciones intermedias. Característica: explota confianza en el orden del flujo.</a:t>
-            </a:r>
-          </a:p>
-          <a:p>
-            <a:pPr>
-              <a:spcAft>
-                <a:spcPts val="600"/>
-              </a:spcAft>
-            </a:pPr>
-            <a:r>
-              <a:rPr sz="1500">
-                <a:solidFill>
-                  <a:srgbClr val="22282E"/>
-                </a:solidFill>
-              </a:rPr>
-              <a:t>•  Race condition (TOCTOU): dos operaciones concurrentes producen un estado inconsistente. Característica: ventana entre comprobación y uso.</a:t>
-            </a:r>
-          </a:p>
-          <a:p>
-            <a:pPr>
-              <a:spcAft>
-                <a:spcPts val="600"/>
-              </a:spcAft>
-            </a:pPr>
-            <a:r>
-              <a:rPr sz="1500">
-                <a:solidFill>
-                  <a:srgbClr val="22282E"/>
-                </a:solidFill>
-              </a:rPr>
-              <a:t>•  Manipulación de parámetros de negocio: alterar precio, cantidad o estado en la petición. Característica: el servidor debe recalcular, no confiar.</a:t>
-            </a:r>
-          </a:p>
-          <a:p>
-            <a:pPr>
-              <a:spcAft>
-                <a:spcPts val="600"/>
-              </a:spcAft>
-            </a:pPr>
-            <a:r>
-              <a:rPr sz="1500">
-                <a:solidFill>
-                  <a:srgbClr val="22282E"/>
-                </a:solidFill>
-              </a:rPr>
-              <a:t>•  Idempotencia: una operación repetida no cambia el resultado. Característica: su ausencia habilita abusos (doble canje).</a:t>
-            </a:r>
-          </a:p>
-          <a:p>
-            <a:pPr>
-              <a:spcAft>
-                <a:spcPts val="600"/>
-              </a:spcAft>
-            </a:pPr>
-            <a:r>
-              <a:rPr sz="1500">
-                <a:solidFill>
-                  <a:srgbClr val="22282E"/>
-                </a:solidFill>
-              </a:rPr>
-              <a:t>•  Límite lógico: restricción de negocio (máximos, mínimos). Característica: si no se valida en servidor, se evade.</a:t>
+              <a:t>•  Las vulnerabilidades de lógica de negocio son distintas de todas las anteriores: no hay una</a:t>
+            </a:r>
+          </a:p>
+          <a:p>
+            <a:pPr>
+              <a:spcAft>
+                <a:spcPts val="600"/>
+              </a:spcAft>
+            </a:pPr>
+            <a:r>
+              <a:rPr sz="1500">
+                <a:solidFill>
+                  <a:srgbClr val="22282E"/>
+                </a:solidFill>
+              </a:rPr>
+              <a:t>•  inyección, ni un carácter mágico, ni un patrón que un escáner reconozca. El código funciona</a:t>
+            </a:r>
+          </a:p>
+          <a:p>
+            <a:pPr>
+              <a:spcAft>
+                <a:spcPts val="600"/>
+              </a:spcAft>
+            </a:pPr>
+            <a:r>
+              <a:rPr sz="1500">
+                <a:solidFill>
+                  <a:srgbClr val="22282E"/>
+                </a:solidFill>
+              </a:rPr>
+              <a:t>•  exactamente como se programó; el problema es que la lógica programada permite un abuso que el</a:t>
+            </a:r>
+          </a:p>
+          <a:p>
+            <a:pPr>
+              <a:spcAft>
+                <a:spcPts val="600"/>
+              </a:spcAft>
+            </a:pPr>
+            <a:r>
+              <a:rPr sz="1500">
+                <a:solidFill>
+                  <a:srgbClr val="22282E"/>
+                </a:solidFill>
+              </a:rPr>
+              <a:t>•  desarrollador no anticipó. Por eso son invisibles para las herramientas automáticas (Burp, ZAP, un</a:t>
+            </a:r>
+          </a:p>
+          <a:p>
+            <a:pPr>
+              <a:spcAft>
+                <a:spcPts val="600"/>
+              </a:spcAft>
+            </a:pPr>
+            <a:r>
+              <a:rPr sz="1500">
+                <a:solidFill>
+                  <a:srgbClr val="22282E"/>
+                </a:solidFill>
+              </a:rPr>
+              <a:t>•  escáner de vulnerabilidades no las ve) y solo se encuentran entendiendo qué hace la aplicación y</a:t>
+            </a:r>
+          </a:p>
+          <a:p>
+            <a:pPr>
+              <a:spcAft>
+                <a:spcPts val="600"/>
+              </a:spcAft>
+            </a:pPr>
+            <a:r>
+              <a:rPr sz="1500">
+                <a:solidFill>
+                  <a:srgbClr val="22282E"/>
+                </a:solidFill>
+              </a:rPr>
+              <a:t>•  razonando cómo romper sus reglas. Son, en muchos programas de bug bounty, los hallazgos mejor pagados,</a:t>
+            </a:r>
+          </a:p>
+          <a:p>
+            <a:pPr>
+              <a:spcAft>
+                <a:spcPts val="600"/>
+              </a:spcAft>
+            </a:pPr>
+            <a:r>
+              <a:rPr sz="1500">
+                <a:solidFill>
+                  <a:srgbClr val="22282E"/>
+                </a:solidFill>
+              </a:rPr>
+              <a:t>•  precisamente porque exigen inteligencia humana y no se automatizan.</a:t>
             </a:r>
           </a:p>
         </p:txBody>
@@ -4241,7 +4602,7 @@
                   <a:srgbClr val="0B3D2E"/>
                 </a:solidFill>
               </a:rPr>
-              <a:t>🧰 Herramientas y preparación</a:t>
+              <a:t>📖 Definiciones y características</a:t>
             </a:r>
           </a:p>
         </p:txBody>
@@ -4279,37 +4640,82 @@
                   <a:srgbClr val="22282E"/>
                 </a:solidFill>
               </a:rPr>
-              <a:t>•  PortSwigger labs de business logic y race conditions.</a:t>
-            </a:r>
-          </a:p>
-          <a:p>
-            <a:pPr>
-              <a:spcAft>
-                <a:spcPts val="600"/>
-              </a:spcAft>
-            </a:pPr>
-            <a:r>
-              <a:rPr sz="1500">
-                <a:solidFill>
-                  <a:srgbClr val="22282E"/>
-                </a:solidFill>
-              </a:rPr>
-              <a:t>•  Juice Shop (varios retos de lógica).</a:t>
-            </a:r>
-          </a:p>
-          <a:p>
-            <a:pPr>
-              <a:spcAft>
-                <a:spcPts val="600"/>
-              </a:spcAft>
-            </a:pPr>
-            <a:r>
-              <a:rPr sz="1500">
-                <a:solidFill>
-                  <a:srgbClr val="22282E"/>
-                </a:solidFill>
-              </a:rPr>
-              <a:t>•  Burp (Repeater, Intruder y el modo de peticiones paralelas para race conditions).</a:t>
+              <a:t>•  Falla de lógica: violación de una regla de negocio, no de una tecnología. Característica: invisible para los escáneres.</a:t>
+            </a:r>
+          </a:p>
+          <a:p>
+            <a:pPr>
+              <a:spcAft>
+                <a:spcPts val="600"/>
+              </a:spcAft>
+            </a:pPr>
+            <a:r>
+              <a:rPr sz="1500">
+                <a:solidFill>
+                  <a:srgbClr val="22282E"/>
+                </a:solidFill>
+              </a:rPr>
+              <a:t>•  Flow bypass: completar una operación saltándose pasos o validaciones intermedias. Característica: explota confianza en el orden del flujo.</a:t>
+            </a:r>
+          </a:p>
+          <a:p>
+            <a:pPr>
+              <a:spcAft>
+                <a:spcPts val="600"/>
+              </a:spcAft>
+            </a:pPr>
+            <a:r>
+              <a:rPr sz="1500">
+                <a:solidFill>
+                  <a:srgbClr val="22282E"/>
+                </a:solidFill>
+              </a:rPr>
+              <a:t>•  Race condition (TOCTOU): dos operaciones concurrentes producen un estado inconsistente. Característica: ventana entre comprobación y uso.</a:t>
+            </a:r>
+          </a:p>
+          <a:p>
+            <a:pPr>
+              <a:spcAft>
+                <a:spcPts val="600"/>
+              </a:spcAft>
+            </a:pPr>
+            <a:r>
+              <a:rPr sz="1500">
+                <a:solidFill>
+                  <a:srgbClr val="22282E"/>
+                </a:solidFill>
+              </a:rPr>
+              <a:t>•  Manipulación de parámetros de negocio: alterar precio, cantidad o estado en la petición. Característica: el servidor debe recalcular, no confiar.</a:t>
+            </a:r>
+          </a:p>
+          <a:p>
+            <a:pPr>
+              <a:spcAft>
+                <a:spcPts val="600"/>
+              </a:spcAft>
+            </a:pPr>
+            <a:r>
+              <a:rPr sz="1500">
+                <a:solidFill>
+                  <a:srgbClr val="22282E"/>
+                </a:solidFill>
+              </a:rPr>
+              <a:t>•  Idempotencia: una operación repetida no cambia el resultado. Característica: su ausencia habilita abusos (doble canje).</a:t>
+            </a:r>
+          </a:p>
+          <a:p>
+            <a:pPr>
+              <a:spcAft>
+                <a:spcPts val="600"/>
+              </a:spcAft>
+            </a:pPr>
+            <a:r>
+              <a:rPr sz="1500">
+                <a:solidFill>
+                  <a:srgbClr val="22282E"/>
+                </a:solidFill>
+              </a:rPr>
+              <a:t>•  Límite lógico: restricción de negocio (máximos, mínimos). Característica: si no se valida en servidor, se evade.</a:t>
             </a:r>
           </a:p>
         </p:txBody>
@@ -4360,7 +4766,7 @@
                   <a:srgbClr val="0B3D2E"/>
                 </a:solidFill>
               </a:rPr>
-              <a:t>🧪 Laboratorio guiado</a:t>
+              <a:t>📔 Glosario</a:t>
             </a:r>
           </a:p>
         </p:txBody>
@@ -4398,97 +4804,97 @@
                   <a:srgbClr val="22282E"/>
                 </a:solidFill>
               </a:rPr>
-              <a:t>•  Mapea un flujo de compra completo: carrito → checkout → pago → confirmación.</a:t>
-            </a:r>
-          </a:p>
-          <a:p>
-            <a:pPr>
-              <a:spcAft>
-                <a:spcPts val="600"/>
-              </a:spcAft>
-            </a:pPr>
-            <a:r>
-              <a:rPr sz="1500">
-                <a:solidFill>
-                  <a:srgbClr val="22282E"/>
-                </a:solidFill>
-              </a:rPr>
-              <a:t>•  Intercepta el checkout y manipula el precio o la cantidad (valores negativos, decimales, cero).</a:t>
-            </a:r>
-          </a:p>
-          <a:p>
-            <a:pPr>
-              <a:spcAft>
-                <a:spcPts val="600"/>
-              </a:spcAft>
-            </a:pPr>
-            <a:r>
-              <a:rPr sz="1500">
-                <a:solidFill>
-                  <a:srgbClr val="22282E"/>
-                </a:solidFill>
-              </a:rPr>
-              <a:t>•  Prueba un flow bypass: envía la petición de confirmación sin completar el pago.</a:t>
-            </a:r>
-          </a:p>
-          <a:p>
-            <a:pPr>
-              <a:spcAft>
-                <a:spcPts val="600"/>
-              </a:spcAft>
-            </a:pPr>
-            <a:r>
-              <a:rPr sz="1500">
-                <a:solidFill>
-                  <a:srgbClr val="22282E"/>
-                </a:solidFill>
-              </a:rPr>
-              <a:t>•  Abusa de un cupón: aplícalo varias veces o combínalo indebidamente.</a:t>
-            </a:r>
-          </a:p>
-          <a:p>
-            <a:pPr>
-              <a:spcAft>
-                <a:spcPts val="600"/>
-              </a:spcAft>
-            </a:pPr>
-            <a:r>
-              <a:rPr sz="1500">
-                <a:solidFill>
-                  <a:srgbClr val="22282E"/>
-                </a:solidFill>
-              </a:rPr>
-              <a:t>•  Explota una race condition: envía peticiones paralelas de canje/retiro con Burp (single-packet attack) para superar un límite.</a:t>
-            </a:r>
-          </a:p>
-          <a:p>
-            <a:pPr>
-              <a:spcAft>
-                <a:spcPts val="600"/>
-              </a:spcAft>
-            </a:pPr>
-            <a:r>
-              <a:rPr sz="1500">
-                <a:solidFill>
-                  <a:srgbClr val="22282E"/>
-                </a:solidFill>
-              </a:rPr>
-              <a:t>•  Comprueba límites lógicos: compra más unidades de las permitidas alterando el parámetro.</a:t>
-            </a:r>
-          </a:p>
-          <a:p>
-            <a:pPr>
-              <a:spcAft>
-                <a:spcPts val="600"/>
-              </a:spcAft>
-            </a:pPr>
-            <a:r>
-              <a:rPr sz="1500">
-                <a:solidFill>
-                  <a:srgbClr val="22282E"/>
-                </a:solidFill>
-              </a:rPr>
-              <a:t>•  Documenta la regla violada, la petición manipulada y el impacto económico.</a:t>
+              <a:t>•  Término — Definición concisa</a:t>
+            </a:r>
+          </a:p>
+          <a:p>
+            <a:pPr>
+              <a:spcAft>
+                <a:spcPts val="600"/>
+              </a:spcAft>
+            </a:pPr>
+            <a:r>
+              <a:rPr sz="1500">
+                <a:solidFill>
+                  <a:srgbClr val="22282E"/>
+                </a:solidFill>
+              </a:rPr>
+              <a:t>•  Lógica de negocio — Reglas específicas de la aplicación</a:t>
+            </a:r>
+          </a:p>
+          <a:p>
+            <a:pPr>
+              <a:spcAft>
+                <a:spcPts val="600"/>
+              </a:spcAft>
+            </a:pPr>
+            <a:r>
+              <a:rPr sz="1500">
+                <a:solidFill>
+                  <a:srgbClr val="22282E"/>
+                </a:solidFill>
+              </a:rPr>
+              <a:t>•  Fallo de lógica — Abuso permitido por la lógica; el código funciona "bien"</a:t>
+            </a:r>
+          </a:p>
+          <a:p>
+            <a:pPr>
+              <a:spcAft>
+                <a:spcPts val="600"/>
+              </a:spcAft>
+            </a:pPr>
+            <a:r>
+              <a:rPr sz="1500">
+                <a:solidFill>
+                  <a:srgbClr val="22282E"/>
+                </a:solidFill>
+              </a:rPr>
+              <a:t>•  Invisible a escáneres — No hay patrón que detectar automáticamente</a:t>
+            </a:r>
+          </a:p>
+          <a:p>
+            <a:pPr>
+              <a:spcAft>
+                <a:spcPts val="600"/>
+              </a:spcAft>
+            </a:pPr>
+            <a:r>
+              <a:rPr sz="1500">
+                <a:solidFill>
+                  <a:srgbClr val="22282E"/>
+                </a:solidFill>
+              </a:rPr>
+              <a:t>•  Suposición del desarrollador — Premisa no verificada que el atacante viola</a:t>
+            </a:r>
+          </a:p>
+          <a:p>
+            <a:pPr>
+              <a:spcAft>
+                <a:spcPts val="600"/>
+              </a:spcAft>
+            </a:pPr>
+            <a:r>
+              <a:rPr sz="1500">
+                <a:solidFill>
+                  <a:srgbClr val="22282E"/>
+                </a:solidFill>
+              </a:rPr>
+              <a:t>•  Manipulación de precio — Aceptar el precio o total que envía el cliente</a:t>
+            </a:r>
+          </a:p>
+          <a:p>
+            <a:pPr>
+              <a:spcAft>
+                <a:spcPts val="600"/>
+              </a:spcAft>
+            </a:pPr>
+            <a:r>
+              <a:rPr sz="1500">
+                <a:solidFill>
+                  <a:srgbClr val="22282E"/>
+                </a:solidFill>
+              </a:rPr>
+              <a:t>•  Cantidad negativa — Valor que un cálculo mal hecho convierte en abono</a:t>
             </a:r>
           </a:p>
         </p:txBody>
@@ -4539,7 +4945,7 @@
                   <a:srgbClr val="0B3D2E"/>
                 </a:solidFill>
               </a:rPr>
-              <a:t>✍️ Ejercicios</a:t>
+              <a:t>🧰 Herramientas y preparación</a:t>
             </a:r>
           </a:p>
         </p:txBody>
@@ -4577,82 +4983,37 @@
                   <a:srgbClr val="22282E"/>
                 </a:solidFill>
               </a:rPr>
-              <a:t>•  Encuentra 3 suposiciones del desarrollador que se puedan romper en Juice Shop.</a:t>
-            </a:r>
-          </a:p>
-          <a:p>
-            <a:pPr>
-              <a:spcAft>
-                <a:spcPts val="600"/>
-              </a:spcAft>
-            </a:pPr>
-            <a:r>
-              <a:rPr sz="1500">
-                <a:solidFill>
-                  <a:srgbClr val="22282E"/>
-                </a:solidFill>
-              </a:rPr>
-              <a:t>•  Manipula un precio a un valor negativo y explica el impacto.</a:t>
-            </a:r>
-          </a:p>
-          <a:p>
-            <a:pPr>
-              <a:spcAft>
-                <a:spcPts val="600"/>
-              </a:spcAft>
-            </a:pPr>
-            <a:r>
-              <a:rPr sz="1500">
-                <a:solidFill>
-                  <a:srgbClr val="22282E"/>
-                </a:solidFill>
-              </a:rPr>
-              <a:t>•  Diseña un flow bypass saltando un paso de validación.</a:t>
-            </a:r>
-          </a:p>
-          <a:p>
-            <a:pPr>
-              <a:spcAft>
-                <a:spcPts val="600"/>
-              </a:spcAft>
-            </a:pPr>
-            <a:r>
-              <a:rPr sz="1500">
-                <a:solidFill>
-                  <a:srgbClr val="22282E"/>
-                </a:solidFill>
-              </a:rPr>
-              <a:t>•  Reproduce una race condition de canje múltiple con peticiones paralelas.</a:t>
-            </a:r>
-          </a:p>
-          <a:p>
-            <a:pPr>
-              <a:spcAft>
-                <a:spcPts val="600"/>
-              </a:spcAft>
-            </a:pPr>
-            <a:r>
-              <a:rPr sz="1500">
-                <a:solidFill>
-                  <a:srgbClr val="22282E"/>
-                </a:solidFill>
-              </a:rPr>
-              <a:t>•  Explica por qué recalcular en servidor evita la manipulación de precios.</a:t>
-            </a:r>
-          </a:p>
-          <a:p>
-            <a:pPr>
-              <a:spcAft>
-                <a:spcPts val="600"/>
-              </a:spcAft>
-            </a:pPr>
-            <a:r>
-              <a:rPr sz="1500">
-                <a:solidFill>
-                  <a:srgbClr val="22282E"/>
-                </a:solidFill>
-              </a:rPr>
-              <a:t>•  Propón validaciones de negocio para un carrito de compra.</a:t>
+              <a:t>•  PortSwigger labs de business logic y race conditions.</a:t>
+            </a:r>
+          </a:p>
+          <a:p>
+            <a:pPr>
+              <a:spcAft>
+                <a:spcPts val="600"/>
+              </a:spcAft>
+            </a:pPr>
+            <a:r>
+              <a:rPr sz="1500">
+                <a:solidFill>
+                  <a:srgbClr val="22282E"/>
+                </a:solidFill>
+              </a:rPr>
+              <a:t>•  Juice Shop (varios retos de lógica).</a:t>
+            </a:r>
+          </a:p>
+          <a:p>
+            <a:pPr>
+              <a:spcAft>
+                <a:spcPts val="600"/>
+              </a:spcAft>
+            </a:pPr>
+            <a:r>
+              <a:rPr sz="1500">
+                <a:solidFill>
+                  <a:srgbClr val="22282E"/>
+                </a:solidFill>
+              </a:rPr>
+              <a:t>•  Burp (Repeater, Intruder y el modo de peticiones paralelas para race conditions).</a:t>
             </a:r>
           </a:p>
         </p:txBody>
@@ -4703,7 +5064,7 @@
                   <a:srgbClr val="0B3D2E"/>
                 </a:solidFill>
               </a:rPr>
-              <a:t>📝 Reto verificable</a:t>
+              <a:t>🧪 Laboratorio guiado</a:t>
             </a:r>
           </a:p>
         </p:txBody>
@@ -4741,22 +5102,97 @@
                   <a:srgbClr val="22282E"/>
                 </a:solidFill>
               </a:rPr>
-              <a:t>•  Resuelve un lab de lógica de negocio de PortSwigger (manipulación de precio, flow bypass o race condition) y demuestra el beneficio indebido.</a:t>
-            </a:r>
-          </a:p>
-          <a:p>
-            <a:pPr>
-              <a:spcAft>
-                <a:spcPts val="600"/>
-              </a:spcAft>
-            </a:pPr>
-            <a:r>
-              <a:rPr sz="1500">
-                <a:solidFill>
-                  <a:srgbClr val="22282E"/>
-                </a:solidFill>
-              </a:rPr>
-              <a:t>•  Criterio de aceptación: el lab queda resuelto, documentas la regla de negocio vulnerada, la petición manipulada/paralela y la defensa (validación y recálculo en servidor, idempotencia, bloqueos).</a:t>
+              <a:t>•  Mapea un flujo de compra completo: carrito → checkout → pago → confirmación.</a:t>
+            </a:r>
+          </a:p>
+          <a:p>
+            <a:pPr>
+              <a:spcAft>
+                <a:spcPts val="600"/>
+              </a:spcAft>
+            </a:pPr>
+            <a:r>
+              <a:rPr sz="1500">
+                <a:solidFill>
+                  <a:srgbClr val="22282E"/>
+                </a:solidFill>
+              </a:rPr>
+              <a:t>•  Intercepta el checkout y manipula el precio o la cantidad (valores negativos, decimales, cero).</a:t>
+            </a:r>
+          </a:p>
+          <a:p>
+            <a:pPr>
+              <a:spcAft>
+                <a:spcPts val="600"/>
+              </a:spcAft>
+            </a:pPr>
+            <a:r>
+              <a:rPr sz="1500">
+                <a:solidFill>
+                  <a:srgbClr val="22282E"/>
+                </a:solidFill>
+              </a:rPr>
+              <a:t>•  Prueba un flow bypass: envía la petición de confirmación sin completar el pago.</a:t>
+            </a:r>
+          </a:p>
+          <a:p>
+            <a:pPr>
+              <a:spcAft>
+                <a:spcPts val="600"/>
+              </a:spcAft>
+            </a:pPr>
+            <a:r>
+              <a:rPr sz="1500">
+                <a:solidFill>
+                  <a:srgbClr val="22282E"/>
+                </a:solidFill>
+              </a:rPr>
+              <a:t>•  Abusa de un cupón: aplícalo varias veces o combínalo indebidamente.</a:t>
+            </a:r>
+          </a:p>
+          <a:p>
+            <a:pPr>
+              <a:spcAft>
+                <a:spcPts val="600"/>
+              </a:spcAft>
+            </a:pPr>
+            <a:r>
+              <a:rPr sz="1500">
+                <a:solidFill>
+                  <a:srgbClr val="22282E"/>
+                </a:solidFill>
+              </a:rPr>
+              <a:t>•  Explota una race condition: envía peticiones paralelas de canje/retiro con Burp (single-packet attack) para superar un límite.</a:t>
+            </a:r>
+          </a:p>
+          <a:p>
+            <a:pPr>
+              <a:spcAft>
+                <a:spcPts val="600"/>
+              </a:spcAft>
+            </a:pPr>
+            <a:r>
+              <a:rPr sz="1500">
+                <a:solidFill>
+                  <a:srgbClr val="22282E"/>
+                </a:solidFill>
+              </a:rPr>
+              <a:t>•  Comprueba límites lógicos: compra más unidades de las permitidas alterando el parámetro.</a:t>
+            </a:r>
+          </a:p>
+          <a:p>
+            <a:pPr>
+              <a:spcAft>
+                <a:spcPts val="600"/>
+              </a:spcAft>
+            </a:pPr>
+            <a:r>
+              <a:rPr sz="1500">
+                <a:solidFill>
+                  <a:srgbClr val="22282E"/>
+                </a:solidFill>
+              </a:rPr>
+              <a:t>•  Documenta la regla violada, la petición manipulada y el impacto económico.</a:t>
             </a:r>
           </a:p>
         </p:txBody>
